--- a/Fresh_Vision_PS-II_Presentation.pptx
+++ b/Fresh_Vision_PS-II_Presentation.pptx
@@ -4753,11 +4753,11 @@
             <a:r>
               <a:rPr sz="1100" b="1" i="0">
                 <a:solidFill>
-                  <a:srgbClr val="C2710C"/>
-                </a:solidFill>
-                <a:latin typeface="Calibri"/>
-              </a:rPr>
-              <a:t>[ Dr. Faculty Mentor Name ]</a:t>
+                  <a:srgbClr val="333D4A"/>
+                </a:solidFill>
+                <a:latin typeface="Calibri"/>
+              </a:rPr>
+              <a:t>Dr. Aurobindo Behera</a:t>
             </a:r>
           </a:p>
           <a:p>
